--- a/reports/2026-07-06_2026-07-12.pptx
+++ b/reports/2026-07-06_2026-07-12.pptx
@@ -3246,9 +3246,7 @@
           <a:noFill/>
         </p:spPr>
         <p:txBody>
-          <a:bodyPr wrap="square" anchor="t" lIns="0" rIns="0" tIns="0" bIns="0">
-            <a:spAutoFit/>
-          </a:bodyPr>
+          <a:bodyPr wrap="square" anchor="t" lIns="0" rIns="0" tIns="0" bIns="0"/>
           <a:lstStyle/>
           <a:p>
             <a:pPr algn="l"/>
@@ -3258,6 +3256,8 @@
                   <a:srgbClr val="FF7B3C"/>
                 </a:solidFill>
                 <a:latin typeface="Malgun Gothic"/>
+                <a:ea typeface="Malgun Gothic"/>
+                <a:cs typeface="Malgun Gothic"/>
               </a:rPr>
               <a:t>WEEKLY HR TREND REPORT</a:t>
             </a:r>
@@ -3281,9 +3281,7 @@
           <a:noFill/>
         </p:spPr>
         <p:txBody>
-          <a:bodyPr wrap="square" anchor="t" lIns="0" rIns="0" tIns="0" bIns="0">
-            <a:spAutoFit/>
-          </a:bodyPr>
+          <a:bodyPr wrap="square" anchor="t" lIns="0" rIns="0" tIns="0" bIns="0"/>
           <a:lstStyle/>
           <a:p>
             <a:pPr algn="l"/>
@@ -3293,6 +3291,8 @@
                   <a:srgbClr val="FFFFFF"/>
                 </a:solidFill>
                 <a:latin typeface="Malgun Gothic"/>
+                <a:ea typeface="Malgun Gothic"/>
+                <a:cs typeface="Malgun Gothic"/>
               </a:rPr>
               <a:t>노사동향 주간 리포트</a:t>
             </a:r>
@@ -3316,9 +3316,7 @@
           <a:noFill/>
         </p:spPr>
         <p:txBody>
-          <a:bodyPr wrap="square" anchor="t" lIns="0" rIns="0" tIns="0" bIns="0">
-            <a:spAutoFit/>
-          </a:bodyPr>
+          <a:bodyPr wrap="square" anchor="t" lIns="0" rIns="0" tIns="0" bIns="0"/>
           <a:lstStyle/>
           <a:p>
             <a:pPr algn="l"/>
@@ -3328,6 +3326,8 @@
                   <a:srgbClr val="E3C6F0"/>
                 </a:solidFill>
                 <a:latin typeface="Malgun Gothic"/>
+                <a:ea typeface="Malgun Gothic"/>
+                <a:cs typeface="Malgun Gothic"/>
               </a:rPr>
               <a:t>2026.07.06 ~ 2026.07.12</a:t>
             </a:r>
@@ -3441,9 +3441,7 @@
           <a:noFill/>
         </p:spPr>
         <p:txBody>
-          <a:bodyPr wrap="square" anchor="t" lIns="0" rIns="0" tIns="0" bIns="0">
-            <a:spAutoFit/>
-          </a:bodyPr>
+          <a:bodyPr wrap="square" anchor="t" lIns="0" rIns="0" tIns="0" bIns="0"/>
           <a:lstStyle/>
           <a:p>
             <a:pPr algn="l"/>
@@ -3453,6 +3451,8 @@
                   <a:srgbClr val="5F0080"/>
                 </a:solidFill>
                 <a:latin typeface="Malgun Gothic"/>
+                <a:ea typeface="Malgun Gothic"/>
+                <a:cs typeface="Malgun Gothic"/>
               </a:rPr>
               <a:t>📌 이번 주 한눈에 보기</a:t>
             </a:r>
@@ -3476,9 +3476,7 @@
           <a:noFill/>
         </p:spPr>
         <p:txBody>
-          <a:bodyPr wrap="square" anchor="t" lIns="0" rIns="0" tIns="0" bIns="0">
-            <a:spAutoFit/>
-          </a:bodyPr>
+          <a:bodyPr wrap="square" anchor="t" lIns="0" rIns="0" tIns="0" bIns="0"/>
           <a:lstStyle/>
           <a:p>
             <a:pPr algn="l"/>
@@ -3488,6 +3486,8 @@
                   <a:srgbClr val="16213E"/>
                 </a:solidFill>
                 <a:latin typeface="Malgun Gothic"/>
+                <a:ea typeface="Malgun Gothic"/>
+                <a:cs typeface="Malgun Gothic"/>
               </a:rPr>
               <a:t>●  대법원이 CJ대한통운 원청의 교섭의무를 부정한 반면 배달 라이더는 근로자성을 처음 인정받아, 위탁 배송기사 지위를 둘러싼 법적 공방이 커졌다.</a:t>
             </a:r>
@@ -3511,9 +3511,7 @@
           <a:noFill/>
         </p:spPr>
         <p:txBody>
-          <a:bodyPr wrap="square" anchor="t" lIns="0" rIns="0" tIns="0" bIns="0">
-            <a:spAutoFit/>
-          </a:bodyPr>
+          <a:bodyPr wrap="square" anchor="t" lIns="0" rIns="0" tIns="0" bIns="0"/>
           <a:lstStyle/>
           <a:p>
             <a:pPr algn="l"/>
@@ -3523,6 +3521,8 @@
                   <a:srgbClr val="16213E"/>
                 </a:solidFill>
                 <a:latin typeface="Malgun Gothic"/>
+                <a:ea typeface="Malgun Gothic"/>
+                <a:cs typeface="Malgun Gothic"/>
               </a:rPr>
               <a:t>●  홈플러스가 회생절차 폐지 결정으로 대규모 고용 위기에 직면하며 유통업계 구조조정 우려가 확산됐다.</a:t>
             </a:r>
@@ -3546,9 +3546,7 @@
           <a:noFill/>
         </p:spPr>
         <p:txBody>
-          <a:bodyPr wrap="square" anchor="t" lIns="0" rIns="0" tIns="0" bIns="0">
-            <a:spAutoFit/>
-          </a:bodyPr>
+          <a:bodyPr wrap="square" anchor="t" lIns="0" rIns="0" tIns="0" bIns="0"/>
           <a:lstStyle/>
           <a:p>
             <a:pPr algn="l"/>
@@ -3558,6 +3556,8 @@
                   <a:srgbClr val="16213E"/>
                 </a:solidFill>
                 <a:latin typeface="Malgun Gothic"/>
+                <a:ea typeface="Malgun Gothic"/>
+                <a:cs typeface="Malgun Gothic"/>
               </a:rPr>
               <a:t>●  민주노총의 총파업 선포와 현대차·금융노조 임단협 갈등으로 하반기 노사 긴장이 고조되고 있다.</a:t>
             </a:r>
@@ -3629,9 +3629,7 @@
           <a:noFill/>
         </p:spPr>
         <p:txBody>
-          <a:bodyPr wrap="square" anchor="t" lIns="0" rIns="0" tIns="0" bIns="0">
-            <a:spAutoFit/>
-          </a:bodyPr>
+          <a:bodyPr wrap="square" anchor="t" lIns="0" rIns="0" tIns="0" bIns="0"/>
           <a:lstStyle/>
           <a:p>
             <a:pPr algn="l"/>
@@ -3641,6 +3639,8 @@
                   <a:srgbClr val="16213E"/>
                 </a:solidFill>
                 <a:latin typeface="Malgun Gothic"/>
+                <a:ea typeface="Malgun Gothic"/>
+                <a:cs typeface="Malgun Gothic"/>
               </a:rPr>
               <a:t>🏬 유통업계</a:t>
             </a:r>
@@ -3691,11 +3691,13 @@
           <a:p>
             <a:pPr algn="ctr"/>
             <a:r>
-              <a:rPr sz="1000" b="1">
+              <a:rPr sz="1000" b="1" i="0">
                 <a:solidFill>
                   <a:srgbClr val="5F0080"/>
                 </a:solidFill>
                 <a:latin typeface="Malgun Gothic"/>
+                <a:ea typeface="Malgun Gothic"/>
+                <a:cs typeface="Malgun Gothic"/>
               </a:rPr>
               <a:t>RETAIL</a:t>
             </a:r>
@@ -3790,11 +3792,13 @@
           <a:p>
             <a:pPr algn="ctr"/>
             <a:r>
-              <a:rPr sz="850" b="1">
+              <a:rPr sz="850" b="1" i="0">
                 <a:solidFill>
                   <a:srgbClr val="FFFFFF"/>
                 </a:solidFill>
                 <a:latin typeface="Malgun Gothic"/>
+                <a:ea typeface="Malgun Gothic"/>
+                <a:cs typeface="Malgun Gothic"/>
               </a:rPr>
               <a:t>CHECK</a:t>
             </a:r>
@@ -3818,9 +3822,7 @@
           <a:noFill/>
         </p:spPr>
         <p:txBody>
-          <a:bodyPr wrap="square" anchor="t" lIns="0" rIns="0" tIns="0" bIns="0">
-            <a:spAutoFit/>
-          </a:bodyPr>
+          <a:bodyPr wrap="square" anchor="t" lIns="0" rIns="0" tIns="0" bIns="0"/>
           <a:lstStyle/>
           <a:p>
             <a:pPr algn="l"/>
@@ -3830,6 +3832,9 @@
                   <a:srgbClr val="16213E"/>
                 </a:solidFill>
                 <a:latin typeface="Malgun Gothic"/>
+                <a:ea typeface="Malgun Gothic"/>
+                <a:cs typeface="Malgun Gothic"/>
+                <a:hlinkClick r:id="rId2"/>
               </a:rPr>
               <a:t>배달 라이더 근로자성, 법원 첫 인정</a:t>
             </a:r>
@@ -3853,9 +3858,7 @@
           <a:noFill/>
         </p:spPr>
         <p:txBody>
-          <a:bodyPr wrap="square" anchor="t" lIns="0" rIns="0" tIns="0" bIns="0">
-            <a:spAutoFit/>
-          </a:bodyPr>
+          <a:bodyPr wrap="square" anchor="t" lIns="0" rIns="0" tIns="0" bIns="0"/>
           <a:lstStyle/>
           <a:p>
             <a:pPr algn="l"/>
@@ -3865,6 +3868,8 @@
                   <a:srgbClr val="5B6474"/>
                 </a:solidFill>
                 <a:latin typeface="Malgun Gothic"/>
+                <a:ea typeface="Malgun Gothic"/>
+                <a:cs typeface="Malgun Gothic"/>
               </a:rPr>
               <a:t>서울고법이 배달대행 플랫폼 라이더에 대해 근로기준법상 근로자 지위를 처음 인정했다. 최저임금·퇴직금·부당해고 제한 요구 확산이 예상된다.</a:t>
             </a:r>
@@ -3888,9 +3893,7 @@
           <a:noFill/>
         </p:spPr>
         <p:txBody>
-          <a:bodyPr wrap="square" anchor="t" lIns="0" rIns="0" tIns="0" bIns="0">
-            <a:spAutoFit/>
-          </a:bodyPr>
+          <a:bodyPr wrap="square" anchor="t" lIns="0" rIns="0" tIns="0" bIns="0"/>
           <a:lstStyle/>
           <a:p>
             <a:pPr algn="l"/>
@@ -3900,6 +3903,8 @@
                   <a:srgbClr val="97A0B3"/>
                 </a:solidFill>
                 <a:latin typeface="Malgun Gothic"/>
+                <a:ea typeface="Malgun Gothic"/>
+                <a:cs typeface="Malgun Gothic"/>
               </a:rPr>
               <a:t>경향신문 · 2026.07.07</a:t>
             </a:r>
@@ -3994,11 +3999,13 @@
           <a:p>
             <a:pPr algn="ctr"/>
             <a:r>
-              <a:rPr sz="850" b="1">
+              <a:rPr sz="850" b="1" i="0">
                 <a:solidFill>
                   <a:srgbClr val="FFFFFF"/>
                 </a:solidFill>
                 <a:latin typeface="Malgun Gothic"/>
+                <a:ea typeface="Malgun Gothic"/>
+                <a:cs typeface="Malgun Gothic"/>
               </a:rPr>
               <a:t>CHECK</a:t>
             </a:r>
@@ -4022,9 +4029,7 @@
           <a:noFill/>
         </p:spPr>
         <p:txBody>
-          <a:bodyPr wrap="square" anchor="t" lIns="0" rIns="0" tIns="0" bIns="0">
-            <a:spAutoFit/>
-          </a:bodyPr>
+          <a:bodyPr wrap="square" anchor="t" lIns="0" rIns="0" tIns="0" bIns="0"/>
           <a:lstStyle/>
           <a:p>
             <a:pPr algn="l"/>
@@ -4034,6 +4039,9 @@
                   <a:srgbClr val="16213E"/>
                 </a:solidFill>
                 <a:latin typeface="Malgun Gothic"/>
+                <a:ea typeface="Malgun Gothic"/>
+                <a:cs typeface="Malgun Gothic"/>
+                <a:hlinkClick r:id="rId3"/>
               </a:rPr>
               <a:t>대법원 "CJ대한통운, 택배기사 교섭의무 없다"</a:t>
             </a:r>
@@ -4057,9 +4065,7 @@
           <a:noFill/>
         </p:spPr>
         <p:txBody>
-          <a:bodyPr wrap="square" anchor="t" lIns="0" rIns="0" tIns="0" bIns="0">
-            <a:spAutoFit/>
-          </a:bodyPr>
+          <a:bodyPr wrap="square" anchor="t" lIns="0" rIns="0" tIns="0" bIns="0"/>
           <a:lstStyle/>
           <a:p>
             <a:pPr algn="l"/>
@@ -4069,6 +4075,8 @@
                   <a:srgbClr val="5B6474"/>
                 </a:solidFill>
                 <a:latin typeface="Malgun Gothic"/>
+                <a:ea typeface="Malgun Gothic"/>
+                <a:cs typeface="Malgun Gothic"/>
               </a:rPr>
               <a:t>대법원이 원청과 택배기사 간 명시적 근로계약이 없다는 이유로 CJ대한통운의 단체교섭 의무를 부정하며 원심을 파기환송했다. 택배노조는 강하게 반발했다.</a:t>
             </a:r>
@@ -4092,9 +4100,7 @@
           <a:noFill/>
         </p:spPr>
         <p:txBody>
-          <a:bodyPr wrap="square" anchor="t" lIns="0" rIns="0" tIns="0" bIns="0">
-            <a:spAutoFit/>
-          </a:bodyPr>
+          <a:bodyPr wrap="square" anchor="t" lIns="0" rIns="0" tIns="0" bIns="0"/>
           <a:lstStyle/>
           <a:p>
             <a:pPr algn="l"/>
@@ -4104,6 +4110,8 @@
                   <a:srgbClr val="97A0B3"/>
                 </a:solidFill>
                 <a:latin typeface="Malgun Gothic"/>
+                <a:ea typeface="Malgun Gothic"/>
+                <a:cs typeface="Malgun Gothic"/>
               </a:rPr>
               <a:t>뉴스핌 · 2026.07.09</a:t>
             </a:r>
@@ -4171,9 +4179,7 @@
           <a:noFill/>
         </p:spPr>
         <p:txBody>
-          <a:bodyPr wrap="square" anchor="t" lIns="0" rIns="0" tIns="0" bIns="0">
-            <a:spAutoFit/>
-          </a:bodyPr>
+          <a:bodyPr wrap="square" anchor="t" lIns="0" rIns="0" tIns="0" bIns="0"/>
           <a:lstStyle/>
           <a:p>
             <a:pPr algn="l"/>
@@ -4183,6 +4189,9 @@
                   <a:srgbClr val="16213E"/>
                 </a:solidFill>
                 <a:latin typeface="Malgun Gothic"/>
+                <a:ea typeface="Malgun Gothic"/>
+                <a:cs typeface="Malgun Gothic"/>
+                <a:hlinkClick r:id="rId4"/>
               </a:rPr>
               <a:t>홈플러스 회생절차 폐지…마트노조 비상투쟁</a:t>
             </a:r>
@@ -4206,9 +4215,7 @@
           <a:noFill/>
         </p:spPr>
         <p:txBody>
-          <a:bodyPr wrap="square" anchor="t" lIns="0" rIns="0" tIns="0" bIns="0">
-            <a:spAutoFit/>
-          </a:bodyPr>
+          <a:bodyPr wrap="square" anchor="t" lIns="0" rIns="0" tIns="0" bIns="0"/>
           <a:lstStyle/>
           <a:p>
             <a:pPr algn="l"/>
@@ -4218,6 +4225,8 @@
                   <a:srgbClr val="5B6474"/>
                 </a:solidFill>
                 <a:latin typeface="Malgun Gothic"/>
+                <a:ea typeface="Malgun Gothic"/>
+                <a:cs typeface="Malgun Gothic"/>
               </a:rPr>
               <a:t>서울회생법원이 회생계획의 실행가능성 부족을 이유로 회생절차 폐지를 결정했다. 마트산업노조는 DIP 자금 확보 실패 시 청산이 불가피하다며 정부에 긴급조치를 요구했다.</a:t>
             </a:r>
@@ -4241,9 +4250,7 @@
           <a:noFill/>
         </p:spPr>
         <p:txBody>
-          <a:bodyPr wrap="square" anchor="t" lIns="0" rIns="0" tIns="0" bIns="0">
-            <a:spAutoFit/>
-          </a:bodyPr>
+          <a:bodyPr wrap="square" anchor="t" lIns="0" rIns="0" tIns="0" bIns="0"/>
           <a:lstStyle/>
           <a:p>
             <a:pPr algn="l"/>
@@ -4253,6 +4260,8 @@
                   <a:srgbClr val="97A0B3"/>
                 </a:solidFill>
                 <a:latin typeface="Malgun Gothic"/>
+                <a:ea typeface="Malgun Gothic"/>
+                <a:cs typeface="Malgun Gothic"/>
               </a:rPr>
               <a:t>파이낸셜뉴스 · 2026.07.04</a:t>
             </a:r>
@@ -4347,11 +4356,13 @@
           <a:p>
             <a:pPr algn="ctr"/>
             <a:r>
-              <a:rPr sz="850" b="1">
+              <a:rPr sz="850" b="1" i="0">
                 <a:solidFill>
                   <a:srgbClr val="FFFFFF"/>
                 </a:solidFill>
                 <a:latin typeface="Malgun Gothic"/>
+                <a:ea typeface="Malgun Gothic"/>
+                <a:cs typeface="Malgun Gothic"/>
               </a:rPr>
               <a:t>CHECK</a:t>
             </a:r>
@@ -4375,9 +4386,7 @@
           <a:noFill/>
         </p:spPr>
         <p:txBody>
-          <a:bodyPr wrap="square" anchor="t" lIns="0" rIns="0" tIns="0" bIns="0">
-            <a:spAutoFit/>
-          </a:bodyPr>
+          <a:bodyPr wrap="square" anchor="t" lIns="0" rIns="0" tIns="0" bIns="0"/>
           <a:lstStyle/>
           <a:p>
             <a:pPr algn="l"/>
@@ -4387,6 +4396,9 @@
                   <a:srgbClr val="16213E"/>
                 </a:solidFill>
                 <a:latin typeface="Malgun Gothic"/>
+                <a:ea typeface="Malgun Gothic"/>
+                <a:cs typeface="Malgun Gothic"/>
+                <a:hlinkClick r:id="rId5"/>
               </a:rPr>
               <a:t>쿠팡 퀵플렉스, 표준계약서 이후도 장시간 근무 논란</a:t>
             </a:r>
@@ -4410,9 +4422,7 @@
           <a:noFill/>
         </p:spPr>
         <p:txBody>
-          <a:bodyPr wrap="square" anchor="t" lIns="0" rIns="0" tIns="0" bIns="0">
-            <a:spAutoFit/>
-          </a:bodyPr>
+          <a:bodyPr wrap="square" anchor="t" lIns="0" rIns="0" tIns="0" bIns="0"/>
           <a:lstStyle/>
           <a:p>
             <a:pPr algn="l"/>
@@ -4422,6 +4432,8 @@
                   <a:srgbClr val="5B6474"/>
                 </a:solidFill>
                 <a:latin typeface="Malgun Gothic"/>
+                <a:ea typeface="Malgun Gothic"/>
+                <a:cs typeface="Malgun Gothic"/>
               </a:rPr>
               <a:t>배송기사들이 표준계약서 의무화 이후에도 단가 인하와 연속 근무 등 과로성 근무 환경을 호소하며 처우 개선을 요구하고 있다.</a:t>
             </a:r>
@@ -4445,9 +4457,7 @@
           <a:noFill/>
         </p:spPr>
         <p:txBody>
-          <a:bodyPr wrap="square" anchor="t" lIns="0" rIns="0" tIns="0" bIns="0">
-            <a:spAutoFit/>
-          </a:bodyPr>
+          <a:bodyPr wrap="square" anchor="t" lIns="0" rIns="0" tIns="0" bIns="0"/>
           <a:lstStyle/>
           <a:p>
             <a:pPr algn="l"/>
@@ -4457,6 +4467,8 @@
                   <a:srgbClr val="97A0B3"/>
                 </a:solidFill>
                 <a:latin typeface="Malgun Gothic"/>
+                <a:ea typeface="Malgun Gothic"/>
+                <a:cs typeface="Malgun Gothic"/>
               </a:rPr>
               <a:t>한국일보 · 2026.07.12</a:t>
             </a:r>
@@ -4528,9 +4540,7 @@
           <a:noFill/>
         </p:spPr>
         <p:txBody>
-          <a:bodyPr wrap="square" anchor="t" lIns="0" rIns="0" tIns="0" bIns="0">
-            <a:spAutoFit/>
-          </a:bodyPr>
+          <a:bodyPr wrap="square" anchor="t" lIns="0" rIns="0" tIns="0" bIns="0"/>
           <a:lstStyle/>
           <a:p>
             <a:pPr algn="l"/>
@@ -4540,6 +4550,8 @@
                   <a:srgbClr val="16213E"/>
                 </a:solidFill>
                 <a:latin typeface="Malgun Gothic"/>
+                <a:ea typeface="Malgun Gothic"/>
+                <a:cs typeface="Malgun Gothic"/>
               </a:rPr>
               <a:t>🏢 타 산업군</a:t>
             </a:r>
@@ -4590,11 +4602,13 @@
           <a:p>
             <a:pPr algn="ctr"/>
             <a:r>
-              <a:rPr sz="1000" b="1">
+              <a:rPr sz="1000" b="1" i="0">
                 <a:solidFill>
                   <a:srgbClr val="B8501A"/>
                 </a:solidFill>
                 <a:latin typeface="Malgun Gothic"/>
+                <a:ea typeface="Malgun Gothic"/>
+                <a:cs typeface="Malgun Gothic"/>
               </a:rPr>
               <a:t>OTHER</a:t>
             </a:r>
@@ -4689,11 +4703,13 @@
           <a:p>
             <a:pPr algn="ctr"/>
             <a:r>
-              <a:rPr sz="850" b="1">
+              <a:rPr sz="850" b="1" i="0">
                 <a:solidFill>
                   <a:srgbClr val="FFFFFF"/>
                 </a:solidFill>
                 <a:latin typeface="Malgun Gothic"/>
+                <a:ea typeface="Malgun Gothic"/>
+                <a:cs typeface="Malgun Gothic"/>
               </a:rPr>
               <a:t>CHECK</a:t>
             </a:r>
@@ -4717,9 +4733,7 @@
           <a:noFill/>
         </p:spPr>
         <p:txBody>
-          <a:bodyPr wrap="square" anchor="t" lIns="0" rIns="0" tIns="0" bIns="0">
-            <a:spAutoFit/>
-          </a:bodyPr>
+          <a:bodyPr wrap="square" anchor="t" lIns="0" rIns="0" tIns="0" bIns="0"/>
           <a:lstStyle/>
           <a:p>
             <a:pPr algn="l"/>
@@ -4729,6 +4743,9 @@
                   <a:srgbClr val="16213E"/>
                 </a:solidFill>
                 <a:latin typeface="Malgun Gothic"/>
+                <a:ea typeface="Malgun Gothic"/>
+                <a:cs typeface="Malgun Gothic"/>
+                <a:hlinkClick r:id="rId6"/>
               </a:rPr>
               <a:t>민주노총, 원청교섭 압박 총파업 선포</a:t>
             </a:r>
@@ -4752,9 +4769,7 @@
           <a:noFill/>
         </p:spPr>
         <p:txBody>
-          <a:bodyPr wrap="square" anchor="t" lIns="0" rIns="0" tIns="0" bIns="0">
-            <a:spAutoFit/>
-          </a:bodyPr>
+          <a:bodyPr wrap="square" anchor="t" lIns="0" rIns="0" tIns="0" bIns="0"/>
           <a:lstStyle/>
           <a:p>
             <a:pPr algn="l"/>
@@ -4764,6 +4779,8 @@
                   <a:srgbClr val="5B6474"/>
                 </a:solidFill>
                 <a:latin typeface="Malgun Gothic"/>
+                <a:ea typeface="Malgun Gothic"/>
+                <a:cs typeface="Malgun Gothic"/>
               </a:rPr>
               <a:t>개정 노동조합법(노란봉투법) 시행 이후에도 하청노조의 원청교섭이 실질적으로 이뤄지지 않는다며 15일 총파업을 선포, 8~9월까지 투쟁을 이어가겠다고 예고했다.</a:t>
             </a:r>
@@ -4787,9 +4804,7 @@
           <a:noFill/>
         </p:spPr>
         <p:txBody>
-          <a:bodyPr wrap="square" anchor="t" lIns="0" rIns="0" tIns="0" bIns="0">
-            <a:spAutoFit/>
-          </a:bodyPr>
+          <a:bodyPr wrap="square" anchor="t" lIns="0" rIns="0" tIns="0" bIns="0"/>
           <a:lstStyle/>
           <a:p>
             <a:pPr algn="l"/>
@@ -4799,6 +4814,8 @@
                   <a:srgbClr val="97A0B3"/>
                 </a:solidFill>
                 <a:latin typeface="Malgun Gothic"/>
+                <a:ea typeface="Malgun Gothic"/>
+                <a:cs typeface="Malgun Gothic"/>
               </a:rPr>
               <a:t>뉴스핌 · 2026.07.08</a:t>
             </a:r>
@@ -4866,9 +4883,7 @@
           <a:noFill/>
         </p:spPr>
         <p:txBody>
-          <a:bodyPr wrap="square" anchor="t" lIns="0" rIns="0" tIns="0" bIns="0">
-            <a:spAutoFit/>
-          </a:bodyPr>
+          <a:bodyPr wrap="square" anchor="t" lIns="0" rIns="0" tIns="0" bIns="0"/>
           <a:lstStyle/>
           <a:p>
             <a:pPr algn="l"/>
@@ -4878,6 +4893,9 @@
                   <a:srgbClr val="16213E"/>
                 </a:solidFill>
                 <a:latin typeface="Malgun Gothic"/>
+                <a:ea typeface="Malgun Gothic"/>
+                <a:cs typeface="Malgun Gothic"/>
+                <a:hlinkClick r:id="rId7"/>
               </a:rPr>
               <a:t>현대차 노사협상 결렬 위기…노조 "납득 못해"</a:t>
             </a:r>
@@ -4901,9 +4919,7 @@
           <a:noFill/>
         </p:spPr>
         <p:txBody>
-          <a:bodyPr wrap="square" anchor="t" lIns="0" rIns="0" tIns="0" bIns="0">
-            <a:spAutoFit/>
-          </a:bodyPr>
+          <a:bodyPr wrap="square" anchor="t" lIns="0" rIns="0" tIns="0" bIns="0"/>
           <a:lstStyle/>
           <a:p>
             <a:pPr algn="l"/>
@@ -4913,6 +4929,8 @@
                   <a:srgbClr val="5B6474"/>
                 </a:solidFill>
                 <a:latin typeface="Malgun Gothic"/>
+                <a:ea typeface="Malgun Gothic"/>
+                <a:cs typeface="Malgun Gothic"/>
               </a:rPr>
               <a:t>사측이 기본급 8만4000원 인상과 성과금 350%+950만원 등 추가 제시안을 냈지만 노조는 받아들일 수 없다며 쟁의대책위 논의에 들어갔다.</a:t>
             </a:r>
@@ -4936,9 +4954,7 @@
           <a:noFill/>
         </p:spPr>
         <p:txBody>
-          <a:bodyPr wrap="square" anchor="t" lIns="0" rIns="0" tIns="0" bIns="0">
-            <a:spAutoFit/>
-          </a:bodyPr>
+          <a:bodyPr wrap="square" anchor="t" lIns="0" rIns="0" tIns="0" bIns="0"/>
           <a:lstStyle/>
           <a:p>
             <a:pPr algn="l"/>
@@ -4948,6 +4964,8 @@
                   <a:srgbClr val="97A0B3"/>
                 </a:solidFill>
                 <a:latin typeface="Malgun Gothic"/>
+                <a:ea typeface="Malgun Gothic"/>
+                <a:cs typeface="Malgun Gothic"/>
               </a:rPr>
               <a:t>머니투데이 · 2026.07.07</a:t>
             </a:r>
@@ -5015,9 +5033,7 @@
           <a:noFill/>
         </p:spPr>
         <p:txBody>
-          <a:bodyPr wrap="square" anchor="t" lIns="0" rIns="0" tIns="0" bIns="0">
-            <a:spAutoFit/>
-          </a:bodyPr>
+          <a:bodyPr wrap="square" anchor="t" lIns="0" rIns="0" tIns="0" bIns="0"/>
           <a:lstStyle/>
           <a:p>
             <a:pPr algn="l"/>
@@ -5027,6 +5043,9 @@
                   <a:srgbClr val="16213E"/>
                 </a:solidFill>
                 <a:latin typeface="Malgun Gothic"/>
+                <a:ea typeface="Malgun Gothic"/>
+                <a:cs typeface="Malgun Gothic"/>
+                <a:hlinkClick r:id="rId8"/>
               </a:rPr>
               <a:t>금융노조, 임금·주4.5일제 두고 중노위 조정 돌입</a:t>
             </a:r>
@@ -5050,9 +5069,7 @@
           <a:noFill/>
         </p:spPr>
         <p:txBody>
-          <a:bodyPr wrap="square" anchor="t" lIns="0" rIns="0" tIns="0" bIns="0">
-            <a:spAutoFit/>
-          </a:bodyPr>
+          <a:bodyPr wrap="square" anchor="t" lIns="0" rIns="0" tIns="0" bIns="0"/>
           <a:lstStyle/>
           <a:p>
             <a:pPr algn="l"/>
@@ -5062,6 +5079,8 @@
                   <a:srgbClr val="5B6474"/>
                 </a:solidFill>
                 <a:latin typeface="Malgun Gothic"/>
+                <a:ea typeface="Malgun Gothic"/>
+                <a:cs typeface="Malgun Gothic"/>
               </a:rPr>
               <a:t>은행권 임단협이 결렬되며 금융노조가 중앙노동위원회에 조정을 신청했다. 임금 인상률과 주4.5일제 도입 여부가 핵심 쟁점이다.</a:t>
             </a:r>
@@ -5085,9 +5104,7 @@
           <a:noFill/>
         </p:spPr>
         <p:txBody>
-          <a:bodyPr wrap="square" anchor="t" lIns="0" rIns="0" tIns="0" bIns="0">
-            <a:spAutoFit/>
-          </a:bodyPr>
+          <a:bodyPr wrap="square" anchor="t" lIns="0" rIns="0" tIns="0" bIns="0"/>
           <a:lstStyle/>
           <a:p>
             <a:pPr algn="l"/>
@@ -5097,6 +5114,8 @@
                   <a:srgbClr val="97A0B3"/>
                 </a:solidFill>
                 <a:latin typeface="Malgun Gothic"/>
+                <a:ea typeface="Malgun Gothic"/>
+                <a:cs typeface="Malgun Gothic"/>
               </a:rPr>
               <a:t>디지털타임스 · 2026.07.07</a:t>
             </a:r>
@@ -5164,9 +5183,7 @@
           <a:noFill/>
         </p:spPr>
         <p:txBody>
-          <a:bodyPr wrap="square" anchor="t" lIns="0" rIns="0" tIns="0" bIns="0">
-            <a:spAutoFit/>
-          </a:bodyPr>
+          <a:bodyPr wrap="square" anchor="t" lIns="0" rIns="0" tIns="0" bIns="0"/>
           <a:lstStyle/>
           <a:p>
             <a:pPr algn="l"/>
@@ -5176,6 +5193,9 @@
                   <a:srgbClr val="16213E"/>
                 </a:solidFill>
                 <a:latin typeface="Malgun Gothic"/>
+                <a:ea typeface="Malgun Gothic"/>
+                <a:cs typeface="Malgun Gothic"/>
+                <a:hlinkClick r:id="rId9"/>
               </a:rPr>
               <a:t>공무원노조, 임금 7.1% 인상 요구 대규모 집회</a:t>
             </a:r>
@@ -5199,9 +5219,7 @@
           <a:noFill/>
         </p:spPr>
         <p:txBody>
-          <a:bodyPr wrap="square" anchor="t" lIns="0" rIns="0" tIns="0" bIns="0">
-            <a:spAutoFit/>
-          </a:bodyPr>
+          <a:bodyPr wrap="square" anchor="t" lIns="0" rIns="0" tIns="0" bIns="0"/>
           <a:lstStyle/>
           <a:p>
             <a:pPr algn="l"/>
@@ -5211,6 +5229,8 @@
                   <a:srgbClr val="5B6474"/>
                 </a:solidFill>
                 <a:latin typeface="Malgun Gothic"/>
+                <a:ea typeface="Malgun Gothic"/>
+                <a:cs typeface="Malgun Gothic"/>
               </a:rPr>
               <a:t>공노총이 2027년도 임금 7.1% 인상과 연금 소득공백 해소를 요구하며 광화문에서 약 2만 명 규모의 노동자대회를 열었다.</a:t>
             </a:r>
@@ -5234,9 +5254,7 @@
           <a:noFill/>
         </p:spPr>
         <p:txBody>
-          <a:bodyPr wrap="square" anchor="t" lIns="0" rIns="0" tIns="0" bIns="0">
-            <a:spAutoFit/>
-          </a:bodyPr>
+          <a:bodyPr wrap="square" anchor="t" lIns="0" rIns="0" tIns="0" bIns="0"/>
           <a:lstStyle/>
           <a:p>
             <a:pPr algn="l"/>
@@ -5246,6 +5264,8 @@
                   <a:srgbClr val="97A0B3"/>
                 </a:solidFill>
                 <a:latin typeface="Malgun Gothic"/>
+                <a:ea typeface="Malgun Gothic"/>
+                <a:cs typeface="Malgun Gothic"/>
               </a:rPr>
               <a:t>브릿지경제 · 2026.07.11</a:t>
             </a:r>
@@ -5269,9 +5289,7 @@
           <a:noFill/>
         </p:spPr>
         <p:txBody>
-          <a:bodyPr wrap="square" anchor="t" lIns="0" rIns="0" tIns="0" bIns="0">
-            <a:spAutoFit/>
-          </a:bodyPr>
+          <a:bodyPr wrap="square" anchor="t" lIns="0" rIns="0" tIns="0" bIns="0"/>
           <a:lstStyle/>
           <a:p>
             <a:pPr algn="l"/>
@@ -5281,6 +5299,8 @@
                   <a:srgbClr val="97A0B3"/>
                 </a:solidFill>
                 <a:latin typeface="Malgun Gothic"/>
+                <a:ea typeface="Malgun Gothic"/>
+                <a:cs typeface="Malgun Gothic"/>
               </a:rPr>
               <a:t>노사동향 위클리</a:t>
             </a:r>
@@ -5304,9 +5324,7 @@
           <a:noFill/>
         </p:spPr>
         <p:txBody>
-          <a:bodyPr wrap="square" anchor="t" lIns="0" rIns="0" tIns="0" bIns="0">
-            <a:spAutoFit/>
-          </a:bodyPr>
+          <a:bodyPr wrap="square" anchor="t" lIns="0" rIns="0" tIns="0" bIns="0"/>
           <a:lstStyle/>
           <a:p>
             <a:pPr algn="r"/>
@@ -5316,6 +5334,8 @@
                   <a:srgbClr val="97A0B3"/>
                 </a:solidFill>
                 <a:latin typeface="Malgun Gothic"/>
+                <a:ea typeface="Malgun Gothic"/>
+                <a:cs typeface="Malgun Gothic"/>
               </a:rPr>
               <a:t>발행일 2026.07.18</a:t>
             </a:r>
@@ -5432,12 +5452,20 @@
           </a:p>
         </p:txBody>
       </p:sp>
-      <p:sp>
-        <p:nvSpPr>
-          <p:cNvPr id="4" name="Oval 3"/>
-          <p:cNvSpPr/>
-          <p:nvPr/>
-        </p:nvSpPr>
+      <p:pic>
+        <p:nvPicPr>
+          <p:cNvPr id="4" name="Picture 3" descr="avatar.jpg"/>
+          <p:cNvPicPr>
+            <a:picLocks noChangeAspect="1"/>
+          </p:cNvPicPr>
+          <p:nvPr/>
+        </p:nvPicPr>
+        <p:blipFill>
+          <a:blip r:embed="rId2"/>
+          <a:stretch>
+            <a:fillRect/>
+          </a:stretch>
+        </p:blipFill>
         <p:spPr>
           <a:xfrm>
             <a:off x="777240" y="777240"/>
@@ -5446,40 +5474,8 @@
           <a:prstGeom prst="ellipse">
             <a:avLst/>
           </a:prstGeom>
-          <a:solidFill>
-            <a:srgbClr val="EAE3F0"/>
-          </a:solidFill>
-          <a:ln>
-            <a:noFill/>
-          </a:ln>
-          <a:effectLst/>
-        </p:spPr>
-        <p:style>
-          <a:lnRef idx="1">
-            <a:schemeClr val="accent1"/>
-          </a:lnRef>
-          <a:fillRef idx="3">
-            <a:schemeClr val="accent1"/>
-          </a:fillRef>
-          <a:effectRef idx="2">
-            <a:schemeClr val="accent1"/>
-          </a:effectRef>
-          <a:fontRef idx="minor">
-            <a:schemeClr val="lt1"/>
-          </a:fontRef>
-        </p:style>
-        <p:txBody>
-          <a:bodyPr rtlCol="0" anchor="ctr" lIns="0" rIns="0" tIns="0" bIns="0"/>
-          <a:lstStyle/>
-          <a:p>
-            <a:pPr algn="ctr"/>
-            <a:r>
-              <a:rPr sz="2200"/>
-              <a:t>🧑‍💼</a:t>
-            </a:r>
-          </a:p>
-        </p:txBody>
-      </p:sp>
+        </p:spPr>
+      </p:pic>
       <p:sp>
         <p:nvSpPr>
           <p:cNvPr id="5" name="TextBox 4"/>
@@ -5497,9 +5493,7 @@
           <a:noFill/>
         </p:spPr>
         <p:txBody>
-          <a:bodyPr wrap="square" anchor="ctr" lIns="0" rIns="0" tIns="0" bIns="0">
-            <a:spAutoFit/>
-          </a:bodyPr>
+          <a:bodyPr wrap="square" anchor="ctr" lIns="0" rIns="0" tIns="0" bIns="0"/>
           <a:lstStyle/>
           <a:p>
             <a:pPr algn="l"/>
@@ -5509,6 +5503,8 @@
                   <a:srgbClr val="16213E"/>
                 </a:solidFill>
                 <a:latin typeface="Malgun Gothic"/>
+                <a:ea typeface="Malgun Gothic"/>
+                <a:cs typeface="Malgun Gothic"/>
               </a:rPr>
               <a:t>📝 담당자 코멘트</a:t>
             </a:r>
@@ -5582,11 +5578,13 @@
           <a:lstStyle/>
           <a:p>
             <a:r>
-              <a:rPr sz="1400" i="1">
+              <a:rPr sz="1400" b="0" i="1">
                 <a:solidFill>
                   <a:srgbClr val="A7AEB8"/>
                 </a:solidFill>
                 <a:latin typeface="Malgun Gothic"/>
+                <a:ea typeface="Malgun Gothic"/>
+                <a:cs typeface="Malgun Gothic"/>
               </a:rPr>
               <a:t>여기에 의견을 작성하세요.</a:t>
             </a:r>
